--- a/dist/초4/과학/땅과밤하늘/초4_과학_땅과밤하늘_01_흐르는물과땅.pptx
+++ b/dist/초4/과학/땅과밤하늘/초4_과학_땅과밤하늘_01_흐르는물과땅.pptx
@@ -121,13 +121,13 @@
   <p:extLst>
     <p:ext uri="{521415D9-36F7-43E2-AB2F-B90AF26B5E84}">
       <p14:sectionLst xmlns:p14="http://schemas.microsoft.com/office/powerpoint/2010/main">
-        <p14:section name="도입" id="{9a2e0d0e-4145-0d6a-9571-3f7a10e1f2a8}">
+        <p14:section name="도입" id="{5108267f-0193-eea6-7dc5-345a81d9c491}">
           <p14:sldIdLst>
             <p14:sldId id="256"/>
             <p14:sldId id="257"/>
           </p14:sldIdLst>
         </p14:section>
-        <p14:section name="연습" id="{41a71434-82f6-a812-1c13-f446ba2d3c5d}">
+        <p14:section name="연습" id="{5f5d7bd6-f7f2-25c7-07bf-e18324c36c38}">
           <p14:sldIdLst>
             <p14:sldId id="258"/>
             <p14:sldId id="259"/>
@@ -136,35 +136,35 @@
             <p14:sldId id="265"/>
           </p14:sldIdLst>
         </p14:section>
-        <p14:section name="개념" id="{60dae104-0a60-76c0-4664-5892af6f6973}">
+        <p14:section name="개념" id="{9018f1ec-942d-e546-2ff0-1d19dcfb7040}">
           <p14:sldIdLst>
             <p14:sldId id="261"/>
             <p14:sldId id="263"/>
             <p14:sldId id="264"/>
           </p14:sldIdLst>
         </p14:section>
-        <p14:section name="연습" id="{1be97078-b534-d93b-cb7f-c543130b5817}">
+        <p14:section name="연습" id="{8f3ceab4-3eab-2c10-78df-d175250f1733}">
           <p14:sldIdLst/>
         </p14:section>
-        <p14:section name="개념" id="{d7644ea4-e191-8c4d-c179-bd9db70d1e8f}">
+        <p14:section name="개념" id="{59bc872b-3ecd-ef2e-712c-f61fc083d41d}">
           <p14:sldIdLst/>
         </p14:section>
-        <p14:section name="연습" id="{129a63f7-a8d9-0a69-77ef-7a0472e8f622}">
+        <p14:section name="연습" id="{ab1dad6c-f546-a8ea-18e7-119bff6a31a1}">
           <p14:sldIdLst/>
         </p14:section>
-        <p14:section name="확인" id="{2bf8efea-e592-45d6-f302-f8ff6fdec813}">
+        <p14:section name="확인" id="{52034a0c-2c63-f3ef-69ac-40a2d1df6aba}">
           <p14:sldIdLst>
             <p14:sldId id="266"/>
             <p14:sldId id="267"/>
             <p14:sldId id="268"/>
           </p14:sldIdLst>
         </p14:section>
-        <p14:section name="정리" id="{fb210425-61e9-97cf-b96b-a199adf46ebc}">
+        <p14:section name="정리" id="{314ae645-e3c8-bf09-538f-ee11841199d3}">
           <p14:sldIdLst>
             <p14:sldId id="269"/>
           </p14:sldIdLst>
         </p14:section>
-        <p14:section name="보충" id="{d50bd3a7-8902-047b-f56a-8708cad477ef}">
+        <p14:section name="보충" id="{b6c571be-2d47-8a62-ce96-35d861a4776e}">
           <p14:sldIdLst>
             <p14:sldId id="270"/>
           </p14:sldIdLst>
@@ -1183,7 +1183,7 @@
 막히면
 - 쟁반을 기울이고 물을 조금 부어, 높은 쪽에서 낮은 쪽으로 흐르는 것을 보여 줍니다. 지도나 지구본이 있으면 강이 바다로 이어지는 곳을 함께 찾습니다.
 주의
-- 이 차시는 계획상 선수 차시가 없습니다. 보충으로도 어려우면 초3 ‘지구의 표면과 바다’(KR22-G03-SCI-EARTHSEA-L01)를 먼저 합니다.
+- 계획상 선수 차시는 초3 ‘지구의 표면과 바다’(KR22-G03-SCI-EARTHSEA-L01)입니다. 보충으로도 어려우면 그 차시(특히 S03 ‘지구 표면의 여러 모습’)를 먼저 합니다.
 - 보충이 오래 걸리면 오늘은 여기까지 하고 다음 날 S02부터 다시 시작합니다.</a:t>
             </a:r>
             <a:endParaRPr lang="en-US" dirty="0"/>
@@ -1273,7 +1273,7 @@
             <a:r>
               <a:rPr lang="en-US" dirty="0"/>
               <a:t>[S02 · 선수 학습 확인(지구 표면의 모습, 물이 흐르는 방향)]
-목적: 초3 ‘지구의 표면과 바다’(KR22-G03-SCI-EARTHSEA-L01)에서 배운 지구 표면의 모습(산·들·강·바다)과, 물이 높은 곳에서 낮은 곳으로 흐른다는 경험을 확인합니다. 이 차시는 계획상 선수 차시가 없습니다.
+목적: 계획상 선수 차시인 초3 ‘지구의 표면과 바다’(KR22-G03-SCI-EARTHSEA-L01)에서 배운 지구 표면의 모습(산·들·강·바다)과, 물이 높은 곳에서 낮은 곳으로 흐른다는 경험을 확인합니다.
 시간: 약 2분
 이렇게 말해 보세요
 - “① 지구 표면에서 볼 수 있는 모습을 세 가지 말해 볼래? 산 말고 또 뭐가 있었지?”

--- a/dist/초4/과학/땅과밤하늘/초4_과학_땅과밤하늘_01_흐르는물과땅.pptx
+++ b/dist/초4/과학/땅과밤하늘/초4_과학_땅과밤하늘_01_흐르는물과땅.pptx
@@ -121,13 +121,13 @@
   <p:extLst>
     <p:ext uri="{521415D9-36F7-43E2-AB2F-B90AF26B5E84}">
       <p14:sectionLst xmlns:p14="http://schemas.microsoft.com/office/powerpoint/2010/main">
-        <p14:section name="도입" id="{5108267f-0193-eea6-7dc5-345a81d9c491}">
+        <p14:section name="도입" id="{1f535925-887a-1515-3bb7-e4ae6aac235b}">
           <p14:sldIdLst>
             <p14:sldId id="256"/>
             <p14:sldId id="257"/>
           </p14:sldIdLst>
         </p14:section>
-        <p14:section name="연습" id="{5f5d7bd6-f7f2-25c7-07bf-e18324c36c38}">
+        <p14:section name="연습" id="{9a310af1-60c7-9b14-80f4-70ca653ca327}">
           <p14:sldIdLst>
             <p14:sldId id="258"/>
             <p14:sldId id="259"/>
@@ -136,35 +136,35 @@
             <p14:sldId id="265"/>
           </p14:sldIdLst>
         </p14:section>
-        <p14:section name="개념" id="{9018f1ec-942d-e546-2ff0-1d19dcfb7040}">
+        <p14:section name="개념" id="{918d049c-0a74-d096-30bb-2e17a544c80d}">
           <p14:sldIdLst>
             <p14:sldId id="261"/>
             <p14:sldId id="263"/>
             <p14:sldId id="264"/>
           </p14:sldIdLst>
         </p14:section>
-        <p14:section name="연습" id="{8f3ceab4-3eab-2c10-78df-d175250f1733}">
+        <p14:section name="연습" id="{44b7e47d-74ae-f8ee-5fa7-5490fca10360}">
           <p14:sldIdLst/>
         </p14:section>
-        <p14:section name="개념" id="{59bc872b-3ecd-ef2e-712c-f61fc083d41d}">
+        <p14:section name="개념" id="{d234bfb6-e401-e93f-dace-0e0557bbaf1e}">
           <p14:sldIdLst/>
         </p14:section>
-        <p14:section name="연습" id="{ab1dad6c-f546-a8ea-18e7-119bff6a31a1}">
+        <p14:section name="연습" id="{9b863903-9a2e-8799-663c-c3df416e6cd3}">
           <p14:sldIdLst/>
         </p14:section>
-        <p14:section name="확인" id="{52034a0c-2c63-f3ef-69ac-40a2d1df6aba}">
+        <p14:section name="확인" id="{fe4f7fb8-59ba-72f9-9337-6ea1ae47b70b}">
           <p14:sldIdLst>
             <p14:sldId id="266"/>
             <p14:sldId id="267"/>
             <p14:sldId id="268"/>
           </p14:sldIdLst>
         </p14:section>
-        <p14:section name="정리" id="{314ae645-e3c8-bf09-538f-ee11841199d3}">
+        <p14:section name="정리" id="{c2d1352a-5e78-bade-fd5f-9566a734081f}">
           <p14:sldIdLst>
             <p14:sldId id="269"/>
           </p14:sldIdLst>
         </p14:section>
-        <p14:section name="보충" id="{b6c571be-2d47-8a62-ce96-35d861a4776e}">
+        <p14:section name="보충" id="{731f7990-c866-6add-ebfd-7d9b799215f6}">
           <p14:sldIdLst>
             <p14:sldId id="270"/>
           </p14:sldIdLst>
